--- a/dist/초2/수학/자료와규칙/초2_수학_자료와규칙_01_분류하기_학생용.pptx
+++ b/dist/초2/수학/자료와규칙/초2_수학_자료와규칙_01_분류하기_학생용.pptx
@@ -121,13 +121,13 @@
   <p:extLst>
     <p:ext uri="{521415D9-36F7-43E2-AB2F-B90AF26B5E84}">
       <p14:sectionLst xmlns:p14="http://schemas.microsoft.com/office/powerpoint/2010/main">
-        <p14:section name="도입" id="{6572fc26-f035-ffbe-1ca2-3442b131b365}">
+        <p14:section name="도입" id="{9f8d54f3-aa65-a52e-8117-288ee8c35857}">
           <p14:sldIdLst>
             <p14:sldId id="256"/>
             <p14:sldId id="257"/>
           </p14:sldIdLst>
         </p14:section>
-        <p14:section name="개념" id="{8a58ea68-8425-decf-159e-d430430502a6}">
+        <p14:section name="개념" id="{b41fe17a-d414-c8a0-ca14-31684328f683}">
           <p14:sldIdLst>
             <p14:sldId id="258"/>
             <p14:sldId id="259"/>
@@ -136,7 +136,7 @@
             <p14:sldId id="264"/>
           </p14:sldIdLst>
         </p14:section>
-        <p14:section name="연습" id="{2325a74a-aacd-f111-a76a-70abe001d030}">
+        <p14:section name="연습" id="{e1d5970b-ea8b-9fe6-359b-5addd985d718}">
           <p14:sldIdLst>
             <p14:sldId id="261"/>
             <p14:sldId id="262"/>
@@ -144,24 +144,24 @@
             <p14:sldId id="266"/>
           </p14:sldIdLst>
         </p14:section>
-        <p14:section name="개념" id="{ba604182-6eda-b5a8-bcf5-5fc9bf749435}">
+        <p14:section name="개념" id="{0185f52b-668d-e65a-1558-00dd8d79a2c3}">
           <p14:sldIdLst/>
         </p14:section>
-        <p14:section name="연습" id="{1789109f-7268-d2b2-e590-4041851c361b}">
+        <p14:section name="연습" id="{815c99b6-780e-beae-9dc3-58665030a0c3}">
           <p14:sldIdLst/>
         </p14:section>
-        <p14:section name="확인" id="{51ca2ce7-fd2c-c39c-f474-e34ae3bd841d}">
+        <p14:section name="확인" id="{532fd41e-7949-a903-f4c4-b545251dddd4}">
           <p14:sldIdLst>
             <p14:sldId id="267"/>
             <p14:sldId id="268"/>
           </p14:sldIdLst>
         </p14:section>
-        <p14:section name="정리" id="{08df02b9-68d2-a3ae-0ef1-4ba0ffa8dfbc}">
+        <p14:section name="정리" id="{a612a982-3db3-473c-71e1-a2c917bc154e}">
           <p14:sldIdLst>
             <p14:sldId id="269"/>
           </p14:sldIdLst>
         </p14:section>
-        <p14:section name="보충" id="{4713c665-5860-f8f9-e99b-2c7f518c401d}">
+        <p14:section name="보충" id="{23f4107a-0202-8ebd-9563-40191812a6ee}">
           <p14:sldIdLst>
             <p14:sldId id="270"/>
           </p14:sldIdLst>
@@ -9178,7 +9178,7 @@
         </p:nvSpPr>
         <p:spPr>
           <a:xfrm>
-            <a:off x="548640" y="2459736"/>
+            <a:off x="548640" y="2734056"/>
             <a:ext cx="566928" cy="566928"/>
           </a:xfrm>
           <a:prstGeom prst="roundRect">
@@ -9225,8 +9225,8 @@
         </p:nvSpPr>
         <p:spPr>
           <a:xfrm>
-            <a:off x="1540459" y="2169871"/>
-            <a:ext cx="1009498" cy="1009498"/>
+            <a:off x="1600200" y="2290572"/>
+            <a:ext cx="1316736" cy="1316736"/>
           </a:xfrm>
           <a:prstGeom prst="ellipse">
             <a:avLst/>
@@ -9250,8 +9250,8 @@
         </p:nvSpPr>
         <p:spPr>
           <a:xfrm>
-            <a:off x="2942539" y="2215757"/>
-            <a:ext cx="1009498" cy="917725"/>
+            <a:off x="3429000" y="2350424"/>
+            <a:ext cx="1316736" cy="1197033"/>
           </a:xfrm>
           <a:prstGeom prst="triangle">
             <a:avLst/>
@@ -9275,8 +9275,8 @@
         </p:nvSpPr>
         <p:spPr>
           <a:xfrm>
-            <a:off x="4344619" y="2169871"/>
-            <a:ext cx="1009498" cy="1009498"/>
+            <a:off x="5257800" y="2290572"/>
+            <a:ext cx="1316736" cy="1316736"/>
           </a:xfrm>
           <a:prstGeom prst="rect">
             <a:avLst/>
@@ -9300,7 +9300,7 @@
         </p:nvSpPr>
         <p:spPr>
           <a:xfrm>
-            <a:off x="548640" y="4654296"/>
+            <a:off x="548640" y="4928616"/>
             <a:ext cx="566928" cy="566928"/>
           </a:xfrm>
           <a:prstGeom prst="roundRect">
@@ -9347,7 +9347,7 @@
         </p:nvSpPr>
         <p:spPr>
           <a:xfrm>
-            <a:off x="1863090" y="4382262"/>
+            <a:off x="2503170" y="4656582"/>
             <a:ext cx="425196" cy="425196"/>
           </a:xfrm>
           <a:prstGeom prst="ellipse">
@@ -9372,7 +9372,7 @@
         </p:nvSpPr>
         <p:spPr>
           <a:xfrm>
-            <a:off x="2548890" y="4382262"/>
+            <a:off x="3188970" y="4656582"/>
             <a:ext cx="425196" cy="425196"/>
           </a:xfrm>
           <a:prstGeom prst="ellipse">
@@ -9397,7 +9397,7 @@
         </p:nvSpPr>
         <p:spPr>
           <a:xfrm>
-            <a:off x="3234690" y="4382262"/>
+            <a:off x="3874770" y="4656582"/>
             <a:ext cx="425196" cy="425196"/>
           </a:xfrm>
           <a:prstGeom prst="ellipse">
@@ -9422,7 +9422,7 @@
         </p:nvSpPr>
         <p:spPr>
           <a:xfrm>
-            <a:off x="3920490" y="4382262"/>
+            <a:off x="4560570" y="4656582"/>
             <a:ext cx="425196" cy="425196"/>
           </a:xfrm>
           <a:prstGeom prst="ellipse">
@@ -9447,7 +9447,7 @@
         </p:nvSpPr>
         <p:spPr>
           <a:xfrm>
-            <a:off x="4606290" y="4382262"/>
+            <a:off x="5246370" y="4656582"/>
             <a:ext cx="425196" cy="425196"/>
           </a:xfrm>
           <a:prstGeom prst="ellipse">
@@ -9472,7 +9472,7 @@
         </p:nvSpPr>
         <p:spPr>
           <a:xfrm>
-            <a:off x="1863090" y="5068062"/>
+            <a:off x="2503170" y="5342382"/>
             <a:ext cx="425196" cy="425196"/>
           </a:xfrm>
           <a:prstGeom prst="ellipse">
@@ -9497,7 +9497,7 @@
         </p:nvSpPr>
         <p:spPr>
           <a:xfrm>
-            <a:off x="2548890" y="5068062"/>
+            <a:off x="3188970" y="5342382"/>
             <a:ext cx="425196" cy="425196"/>
           </a:xfrm>
           <a:prstGeom prst="ellipse">
@@ -9522,7 +9522,7 @@
         </p:nvSpPr>
         <p:spPr>
           <a:xfrm>
-            <a:off x="3234690" y="5068062"/>
+            <a:off x="3874770" y="5342382"/>
             <a:ext cx="425196" cy="425196"/>
           </a:xfrm>
           <a:prstGeom prst="ellipse">
@@ -9547,7 +9547,7 @@
         </p:nvSpPr>
         <p:spPr>
           <a:xfrm>
-            <a:off x="1732788" y="4251960"/>
+            <a:off x="2372868" y="4526280"/>
             <a:ext cx="3429000" cy="1371600"/>
           </a:xfrm>
           <a:prstGeom prst="rect">

--- a/dist/초2/수학/자료와규칙/초2_수학_자료와규칙_01_분류하기_학생용.pptx
+++ b/dist/초2/수학/자료와규칙/초2_수학_자료와규칙_01_분류하기_학생용.pptx
@@ -121,13 +121,13 @@
   <p:extLst>
     <p:ext uri="{521415D9-36F7-43E2-AB2F-B90AF26B5E84}">
       <p14:sectionLst xmlns:p14="http://schemas.microsoft.com/office/powerpoint/2010/main">
-        <p14:section name="도입" id="{9f8d54f3-aa65-a52e-8117-288ee8c35857}">
+        <p14:section name="도입" id="{63ea5e6a-6fda-1284-2021-9b7a376e2f9a}">
           <p14:sldIdLst>
             <p14:sldId id="256"/>
             <p14:sldId id="257"/>
           </p14:sldIdLst>
         </p14:section>
-        <p14:section name="개념" id="{b41fe17a-d414-c8a0-ca14-31684328f683}">
+        <p14:section name="개념" id="{edfb8328-617d-1ab2-415a-d51323195066}">
           <p14:sldIdLst>
             <p14:sldId id="258"/>
             <p14:sldId id="259"/>
@@ -136,7 +136,7 @@
             <p14:sldId id="264"/>
           </p14:sldIdLst>
         </p14:section>
-        <p14:section name="연습" id="{e1d5970b-ea8b-9fe6-359b-5addd985d718}">
+        <p14:section name="연습" id="{53a29bbb-df68-d874-7856-2a5fdea369e9}">
           <p14:sldIdLst>
             <p14:sldId id="261"/>
             <p14:sldId id="262"/>
@@ -144,24 +144,24 @@
             <p14:sldId id="266"/>
           </p14:sldIdLst>
         </p14:section>
-        <p14:section name="개념" id="{0185f52b-668d-e65a-1558-00dd8d79a2c3}">
+        <p14:section name="개념" id="{6effb2d2-dd2e-50e3-5fcf-bb2945a77237}">
           <p14:sldIdLst/>
         </p14:section>
-        <p14:section name="연습" id="{815c99b6-780e-beae-9dc3-58665030a0c3}">
+        <p14:section name="연습" id="{aa828b14-39a4-3f83-1c6a-f2611a34a302}">
           <p14:sldIdLst/>
         </p14:section>
-        <p14:section name="확인" id="{532fd41e-7949-a903-f4c4-b545251dddd4}">
+        <p14:section name="확인" id="{77f36c73-ab76-e2b1-3aaf-e175d91cc8e4}">
           <p14:sldIdLst>
             <p14:sldId id="267"/>
             <p14:sldId id="268"/>
           </p14:sldIdLst>
         </p14:section>
-        <p14:section name="정리" id="{a612a982-3db3-473c-71e1-a2c917bc154e}">
+        <p14:section name="정리" id="{a7dd3fe3-ec78-05fd-58e4-27e0c79d6a7e}">
           <p14:sldIdLst>
             <p14:sldId id="269"/>
           </p14:sldIdLst>
         </p14:section>
-        <p14:section name="보충" id="{23f4107a-0202-8ebd-9563-40191812a6ee}">
+        <p14:section name="보충" id="{5c47b793-383d-b390-94ce-6d842672543b}">
           <p14:sldIdLst>
             <p14:sldId id="270"/>
           </p14:sldIdLst>
@@ -3849,7 +3849,7 @@
           </p:nvPr>
         </p:nvGraphicFramePr>
         <p:xfrm>
-          <a:off x="6254496" y="3037840"/>
+          <a:off x="6254496" y="3054350"/>
           <a:ext cx="5385816" cy="914400"/>
         </p:xfrm>
         <a:graphic>
@@ -3862,7 +3862,7 @@
                 <a:gridCol w="1346454"/>
                 <a:gridCol w="1346454"/>
               </a:tblGrid>
-              <a:tr h="528320">
+              <a:tr h="511810">
                 <a:tc>
                   <a:txBody>
                     <a:bodyPr/>
@@ -4136,7 +4136,7 @@
                   </a:tcPr>
                 </a:tc>
               </a:tr>
-              <a:tr h="528320">
+              <a:tr h="511810">
                 <a:tc>
                   <a:txBody>
                     <a:bodyPr/>
@@ -4684,7 +4684,7 @@
           </p:nvPr>
         </p:nvGraphicFramePr>
         <p:xfrm>
-          <a:off x="548640" y="3609340"/>
+          <a:off x="548640" y="3625850"/>
           <a:ext cx="5362956" cy="914400"/>
         </p:xfrm>
         <a:graphic>
@@ -4697,7 +4697,7 @@
                 <a:gridCol w="1340739"/>
                 <a:gridCol w="1340739"/>
               </a:tblGrid>
-              <a:tr h="528320">
+              <a:tr h="511810">
                 <a:tc>
                   <a:txBody>
                     <a:bodyPr/>
@@ -4971,7 +4971,7 @@
                   </a:tcPr>
                 </a:tc>
               </a:tr>
-              <a:tr h="528320">
+              <a:tr h="511810">
                 <a:tc>
                   <a:txBody>
                     <a:bodyPr/>
@@ -5311,7 +5311,7 @@
           </p:nvPr>
         </p:nvGraphicFramePr>
         <p:xfrm>
-          <a:off x="6277356" y="3609340"/>
+          <a:off x="6277356" y="3625850"/>
           <a:ext cx="5362956" cy="914400"/>
         </p:xfrm>
         <a:graphic>
@@ -5324,7 +5324,7 @@
                 <a:gridCol w="1340739"/>
                 <a:gridCol w="1340739"/>
               </a:tblGrid>
-              <a:tr h="528320">
+              <a:tr h="511810">
                 <a:tc>
                   <a:txBody>
                     <a:bodyPr/>
@@ -5598,7 +5598,7 @@
                   </a:tcPr>
                 </a:tc>
               </a:tr>
-              <a:tr h="528320">
+              <a:tr h="511810">
                 <a:tc>
                   <a:txBody>
                     <a:bodyPr/>
@@ -6887,7 +6887,7 @@
           </p:nvPr>
         </p:nvGraphicFramePr>
         <p:xfrm>
-          <a:off x="6254496" y="3037840"/>
+          <a:off x="6254496" y="3054350"/>
           <a:ext cx="5385816" cy="914400"/>
         </p:xfrm>
         <a:graphic>
@@ -6900,7 +6900,7 @@
                 <a:gridCol w="1346454"/>
                 <a:gridCol w="1346454"/>
               </a:tblGrid>
-              <a:tr h="528320">
+              <a:tr h="511810">
                 <a:tc>
                   <a:txBody>
                     <a:bodyPr/>
@@ -7174,7 +7174,7 @@
                   </a:tcPr>
                 </a:tc>
               </a:tr>
-              <a:tr h="528320">
+              <a:tr h="511810">
                 <a:tc>
                   <a:txBody>
                     <a:bodyPr/>
@@ -11270,12 +11270,12 @@
         </p:nvSpPr>
         <p:spPr>
           <a:xfrm>
-            <a:off x="548640" y="4251960"/>
-            <a:ext cx="5431536" cy="868680"/>
+            <a:off x="548640" y="3799840"/>
+            <a:ext cx="5431536" cy="1320800"/>
           </a:xfrm>
           <a:prstGeom prst="roundRect">
             <a:avLst>
-              <a:gd name="adj" fmla="val 12632"/>
+              <a:gd name="adj" fmla="val 8308"/>
             </a:avLst>
           </a:prstGeom>
           <a:solidFill>
@@ -11297,8 +11297,8 @@
         </p:nvSpPr>
         <p:spPr>
           <a:xfrm>
-            <a:off x="822960" y="4389120"/>
-            <a:ext cx="4882896" cy="594360"/>
+            <a:off x="822960" y="3937000"/>
+            <a:ext cx="4882896" cy="1046480"/>
           </a:xfrm>
           <a:prstGeom prst="rect">
             <a:avLst/>
@@ -11339,12 +11339,12 @@
         </p:nvSpPr>
         <p:spPr>
           <a:xfrm>
-            <a:off x="6208776" y="4251960"/>
-            <a:ext cx="5431536" cy="868680"/>
+            <a:off x="6208776" y="3799840"/>
+            <a:ext cx="5431536" cy="1320800"/>
           </a:xfrm>
           <a:prstGeom prst="roundRect">
             <a:avLst>
-              <a:gd name="adj" fmla="val 12632"/>
+              <a:gd name="adj" fmla="val 8308"/>
             </a:avLst>
           </a:prstGeom>
           <a:solidFill>
@@ -11366,8 +11366,8 @@
         </p:nvSpPr>
         <p:spPr>
           <a:xfrm>
-            <a:off x="6483096" y="4389120"/>
-            <a:ext cx="4882896" cy="594360"/>
+            <a:off x="6483096" y="3937000"/>
+            <a:ext cx="4882896" cy="1046480"/>
           </a:xfrm>
           <a:prstGeom prst="rect">
             <a:avLst/>
@@ -11408,12 +11408,12 @@
         </p:nvSpPr>
         <p:spPr>
           <a:xfrm>
-            <a:off x="548640" y="2183701"/>
-            <a:ext cx="1210437" cy="1210437"/>
+            <a:off x="980948" y="2011680"/>
+            <a:ext cx="1102360" cy="1102360"/>
           </a:xfrm>
           <a:prstGeom prst="roundRect">
             <a:avLst>
-              <a:gd name="adj" fmla="val 10576"/>
+              <a:gd name="adj" fmla="val 11613"/>
             </a:avLst>
           </a:prstGeom>
           <a:solidFill>
@@ -11433,7 +11433,7 @@
               <a:buNone/>
             </a:pPr>
             <a:r>
-              <a:rPr lang="ko-KR" altLang="en-US" sz="5200" b="1" dirty="0">
+              <a:rPr lang="ko-KR" altLang="en-US" sz="4800" b="1" dirty="0">
                 <a:solidFill>
                   <a:srgbClr val="1F2937"/>
                 </a:solidFill>
@@ -11443,7 +11443,7 @@
               </a:rPr>
               <a:t>●</a:t>
             </a:r>
-            <a:endParaRPr lang="ko-KR" sz="5200" dirty="0"/>
+            <a:endParaRPr lang="ko-KR" sz="4800" dirty="0"/>
           </a:p>
         </p:txBody>
       </p:sp>
@@ -11455,8 +11455,8 @@
         </p:nvSpPr>
         <p:spPr>
           <a:xfrm>
-            <a:off x="448056" y="3430714"/>
-            <a:ext cx="1411605" cy="402336"/>
+            <a:off x="880364" y="3150616"/>
+            <a:ext cx="1303528" cy="402336"/>
           </a:xfrm>
           <a:prstGeom prst="rect">
             <a:avLst/>
@@ -11494,12 +11494,12 @@
         </p:nvSpPr>
         <p:spPr>
           <a:xfrm>
-            <a:off x="1960245" y="2183701"/>
-            <a:ext cx="1210437" cy="1210437"/>
+            <a:off x="2284476" y="2011680"/>
+            <a:ext cx="1102360" cy="1102360"/>
           </a:xfrm>
           <a:prstGeom prst="roundRect">
             <a:avLst>
-              <a:gd name="adj" fmla="val 10576"/>
+              <a:gd name="adj" fmla="val 11613"/>
             </a:avLst>
           </a:prstGeom>
           <a:solidFill>
@@ -11519,7 +11519,7 @@
               <a:buNone/>
             </a:pPr>
             <a:r>
-              <a:rPr lang="ko-KR" altLang="en-US" sz="5200" b="1" dirty="0">
+              <a:rPr lang="ko-KR" altLang="en-US" sz="4800" b="1" dirty="0">
                 <a:solidFill>
                   <a:srgbClr val="1F2937"/>
                 </a:solidFill>
@@ -11529,7 +11529,7 @@
               </a:rPr>
               <a:t>△</a:t>
             </a:r>
-            <a:endParaRPr lang="ko-KR" sz="5200" dirty="0"/>
+            <a:endParaRPr lang="ko-KR" sz="4800" dirty="0"/>
           </a:p>
         </p:txBody>
       </p:sp>
@@ -11541,8 +11541,8 @@
         </p:nvSpPr>
         <p:spPr>
           <a:xfrm>
-            <a:off x="1859661" y="3430714"/>
-            <a:ext cx="1411605" cy="402336"/>
+            <a:off x="2183892" y="3150616"/>
+            <a:ext cx="1303528" cy="402336"/>
           </a:xfrm>
           <a:prstGeom prst="rect">
             <a:avLst/>
@@ -11580,12 +11580,12 @@
         </p:nvSpPr>
         <p:spPr>
           <a:xfrm>
-            <a:off x="3371850" y="2183701"/>
-            <a:ext cx="1210437" cy="1210437"/>
+            <a:off x="3588004" y="2011680"/>
+            <a:ext cx="1102360" cy="1102360"/>
           </a:xfrm>
           <a:prstGeom prst="roundRect">
             <a:avLst>
-              <a:gd name="adj" fmla="val 10576"/>
+              <a:gd name="adj" fmla="val 11613"/>
             </a:avLst>
           </a:prstGeom>
           <a:solidFill>
@@ -11605,7 +11605,7 @@
               <a:buNone/>
             </a:pPr>
             <a:r>
-              <a:rPr lang="ko-KR" altLang="en-US" sz="5200" b="1" dirty="0">
+              <a:rPr lang="ko-KR" altLang="en-US" sz="4800" b="1" dirty="0">
                 <a:solidFill>
                   <a:srgbClr val="1F2937"/>
                 </a:solidFill>
@@ -11615,7 +11615,7 @@
               </a:rPr>
               <a:t>■</a:t>
             </a:r>
-            <a:endParaRPr lang="ko-KR" sz="5200" dirty="0"/>
+            <a:endParaRPr lang="ko-KR" sz="4800" dirty="0"/>
           </a:p>
         </p:txBody>
       </p:sp>
@@ -11627,8 +11627,8 @@
         </p:nvSpPr>
         <p:spPr>
           <a:xfrm>
-            <a:off x="3271266" y="3430714"/>
-            <a:ext cx="1411605" cy="402336"/>
+            <a:off x="3487420" y="3150616"/>
+            <a:ext cx="1303528" cy="402336"/>
           </a:xfrm>
           <a:prstGeom prst="rect">
             <a:avLst/>
@@ -11666,12 +11666,12 @@
         </p:nvSpPr>
         <p:spPr>
           <a:xfrm>
-            <a:off x="4783455" y="2183701"/>
-            <a:ext cx="1210437" cy="1210437"/>
+            <a:off x="4891532" y="2011680"/>
+            <a:ext cx="1102360" cy="1102360"/>
           </a:xfrm>
           <a:prstGeom prst="roundRect">
             <a:avLst>
-              <a:gd name="adj" fmla="val 10576"/>
+              <a:gd name="adj" fmla="val 11613"/>
             </a:avLst>
           </a:prstGeom>
           <a:solidFill>
@@ -11691,7 +11691,7 @@
               <a:buNone/>
             </a:pPr>
             <a:r>
-              <a:rPr lang="ko-KR" altLang="en-US" sz="5200" b="1" dirty="0">
+              <a:rPr lang="ko-KR" altLang="en-US" sz="4800" b="1" dirty="0">
                 <a:solidFill>
                   <a:srgbClr val="1F2937"/>
                 </a:solidFill>
@@ -11701,7 +11701,7 @@
               </a:rPr>
               <a:t>○</a:t>
             </a:r>
-            <a:endParaRPr lang="ko-KR" sz="5200" dirty="0"/>
+            <a:endParaRPr lang="ko-KR" sz="4800" dirty="0"/>
           </a:p>
         </p:txBody>
       </p:sp>
@@ -11713,8 +11713,8 @@
         </p:nvSpPr>
         <p:spPr>
           <a:xfrm>
-            <a:off x="4682871" y="3430714"/>
-            <a:ext cx="1411605" cy="402336"/>
+            <a:off x="4790948" y="3150616"/>
+            <a:ext cx="1303528" cy="402336"/>
           </a:xfrm>
           <a:prstGeom prst="rect">
             <a:avLst/>
@@ -11752,12 +11752,12 @@
         </p:nvSpPr>
         <p:spPr>
           <a:xfrm>
-            <a:off x="6195060" y="2183701"/>
-            <a:ext cx="1210437" cy="1210437"/>
+            <a:off x="6195060" y="2011680"/>
+            <a:ext cx="1102360" cy="1102360"/>
           </a:xfrm>
           <a:prstGeom prst="roundRect">
             <a:avLst>
-              <a:gd name="adj" fmla="val 10576"/>
+              <a:gd name="adj" fmla="val 11613"/>
             </a:avLst>
           </a:prstGeom>
           <a:solidFill>
@@ -11777,7 +11777,7 @@
               <a:buNone/>
             </a:pPr>
             <a:r>
-              <a:rPr lang="ko-KR" altLang="en-US" sz="5200" b="1" dirty="0">
+              <a:rPr lang="ko-KR" altLang="en-US" sz="4800" b="1" dirty="0">
                 <a:solidFill>
                   <a:srgbClr val="1F2937"/>
                 </a:solidFill>
@@ -11787,7 +11787,7 @@
               </a:rPr>
               <a:t>▲</a:t>
             </a:r>
-            <a:endParaRPr lang="ko-KR" sz="5200" dirty="0"/>
+            <a:endParaRPr lang="ko-KR" sz="4800" dirty="0"/>
           </a:p>
         </p:txBody>
       </p:sp>
@@ -11799,8 +11799,8 @@
         </p:nvSpPr>
         <p:spPr>
           <a:xfrm>
-            <a:off x="6094476" y="3430714"/>
-            <a:ext cx="1411605" cy="402336"/>
+            <a:off x="6094476" y="3150616"/>
+            <a:ext cx="1303528" cy="402336"/>
           </a:xfrm>
           <a:prstGeom prst="rect">
             <a:avLst/>
@@ -11838,12 +11838,12 @@
         </p:nvSpPr>
         <p:spPr>
           <a:xfrm>
-            <a:off x="7606665" y="2183701"/>
-            <a:ext cx="1210437" cy="1210437"/>
+            <a:off x="7498588" y="2011680"/>
+            <a:ext cx="1102360" cy="1102360"/>
           </a:xfrm>
           <a:prstGeom prst="roundRect">
             <a:avLst>
-              <a:gd name="adj" fmla="val 10576"/>
+              <a:gd name="adj" fmla="val 11613"/>
             </a:avLst>
           </a:prstGeom>
           <a:solidFill>
@@ -11863,7 +11863,7 @@
               <a:buNone/>
             </a:pPr>
             <a:r>
-              <a:rPr lang="ko-KR" altLang="en-US" sz="5200" b="1" dirty="0">
+              <a:rPr lang="ko-KR" altLang="en-US" sz="4800" b="1" dirty="0">
                 <a:solidFill>
                   <a:srgbClr val="1F2937"/>
                 </a:solidFill>
@@ -11873,7 +11873,7 @@
               </a:rPr>
               <a:t>●</a:t>
             </a:r>
-            <a:endParaRPr lang="ko-KR" sz="5200" dirty="0"/>
+            <a:endParaRPr lang="ko-KR" sz="4800" dirty="0"/>
           </a:p>
         </p:txBody>
       </p:sp>
@@ -11885,8 +11885,8 @@
         </p:nvSpPr>
         <p:spPr>
           <a:xfrm>
-            <a:off x="7506081" y="3430714"/>
-            <a:ext cx="1411605" cy="402336"/>
+            <a:off x="7398004" y="3150616"/>
+            <a:ext cx="1303528" cy="402336"/>
           </a:xfrm>
           <a:prstGeom prst="rect">
             <a:avLst/>
@@ -11924,12 +11924,12 @@
         </p:nvSpPr>
         <p:spPr>
           <a:xfrm>
-            <a:off x="9018270" y="2183701"/>
-            <a:ext cx="1210437" cy="1210437"/>
+            <a:off x="8802116" y="2011680"/>
+            <a:ext cx="1102360" cy="1102360"/>
           </a:xfrm>
           <a:prstGeom prst="roundRect">
             <a:avLst>
-              <a:gd name="adj" fmla="val 10576"/>
+              <a:gd name="adj" fmla="val 11613"/>
             </a:avLst>
           </a:prstGeom>
           <a:solidFill>
@@ -11949,7 +11949,7 @@
               <a:buNone/>
             </a:pPr>
             <a:r>
-              <a:rPr lang="ko-KR" altLang="en-US" sz="5200" b="1" dirty="0">
+              <a:rPr lang="ko-KR" altLang="en-US" sz="4800" b="1" dirty="0">
                 <a:solidFill>
                   <a:srgbClr val="1F2937"/>
                 </a:solidFill>
@@ -11959,7 +11959,7 @@
               </a:rPr>
               <a:t>□</a:t>
             </a:r>
-            <a:endParaRPr lang="ko-KR" sz="5200" dirty="0"/>
+            <a:endParaRPr lang="ko-KR" sz="4800" dirty="0"/>
           </a:p>
         </p:txBody>
       </p:sp>
@@ -11971,8 +11971,8 @@
         </p:nvSpPr>
         <p:spPr>
           <a:xfrm>
-            <a:off x="8917686" y="3430714"/>
-            <a:ext cx="1411605" cy="402336"/>
+            <a:off x="8701532" y="3150616"/>
+            <a:ext cx="1303528" cy="402336"/>
           </a:xfrm>
           <a:prstGeom prst="rect">
             <a:avLst/>
@@ -12010,12 +12010,12 @@
         </p:nvSpPr>
         <p:spPr>
           <a:xfrm>
-            <a:off x="10429875" y="2183701"/>
-            <a:ext cx="1210437" cy="1210437"/>
+            <a:off x="10105644" y="2011680"/>
+            <a:ext cx="1102360" cy="1102360"/>
           </a:xfrm>
           <a:prstGeom prst="roundRect">
             <a:avLst>
-              <a:gd name="adj" fmla="val 10576"/>
+              <a:gd name="adj" fmla="val 11613"/>
             </a:avLst>
           </a:prstGeom>
           <a:solidFill>
@@ -12035,7 +12035,7 @@
               <a:buNone/>
             </a:pPr>
             <a:r>
-              <a:rPr lang="ko-KR" altLang="en-US" sz="5200" b="1" dirty="0">
+              <a:rPr lang="ko-KR" altLang="en-US" sz="4800" b="1" dirty="0">
                 <a:solidFill>
                   <a:srgbClr val="1F2937"/>
                 </a:solidFill>
@@ -12045,7 +12045,7 @@
               </a:rPr>
               <a:t>●</a:t>
             </a:r>
-            <a:endParaRPr lang="ko-KR" sz="5200" dirty="0"/>
+            <a:endParaRPr lang="ko-KR" sz="4800" dirty="0"/>
           </a:p>
         </p:txBody>
       </p:sp>
@@ -12057,8 +12057,8 @@
         </p:nvSpPr>
         <p:spPr>
           <a:xfrm>
-            <a:off x="10329291" y="3430714"/>
-            <a:ext cx="1411605" cy="402336"/>
+            <a:off x="10005060" y="3150616"/>
+            <a:ext cx="1303528" cy="402336"/>
           </a:xfrm>
           <a:prstGeom prst="rect">
             <a:avLst/>
@@ -14107,7 +14107,7 @@
           </p:nvPr>
         </p:nvGraphicFramePr>
         <p:xfrm>
-          <a:off x="6254496" y="2820162"/>
+          <a:off x="6254496" y="2836672"/>
           <a:ext cx="5385816" cy="914400"/>
         </p:xfrm>
         <a:graphic>
@@ -14120,7 +14120,7 @@
                 <a:gridCol w="1346454"/>
                 <a:gridCol w="1346454"/>
               </a:tblGrid>
-              <a:tr h="528320">
+              <a:tr h="511810">
                 <a:tc>
                   <a:txBody>
                     <a:bodyPr/>
@@ -14394,7 +14394,7 @@
                   </a:tcPr>
                 </a:tc>
               </a:tr>
-              <a:tr h="528320">
+              <a:tr h="511810">
                 <a:tc>
                   <a:txBody>
                     <a:bodyPr/>
@@ -14840,7 +14840,7 @@
           </p:nvPr>
         </p:nvGraphicFramePr>
         <p:xfrm>
-          <a:off x="6813652" y="3883660"/>
+          <a:off x="6813652" y="3900170"/>
           <a:ext cx="4826660" cy="914400"/>
         </p:xfrm>
         <a:graphic>
@@ -14852,7 +14852,7 @@
                 <a:gridCol w="1608887"/>
                 <a:gridCol w="1608887"/>
               </a:tblGrid>
-              <a:tr h="528320">
+              <a:tr h="511810">
                 <a:tc>
                   <a:txBody>
                     <a:bodyPr/>
@@ -15058,7 +15058,7 @@
                   </a:tcPr>
                 </a:tc>
               </a:tr>
-              <a:tr h="528320">
+              <a:tr h="511810">
                 <a:tc>
                   <a:txBody>
                     <a:bodyPr/>
